--- a/.lessons/22 Fundamental MIddleware/6 Controller Middleware/1.pptx
+++ b/.lessons/22 Fundamental MIddleware/6 Controller Middleware/1.pptx
@@ -8,6 +8,10 @@
     <p:sldId id="402" r:id="rId2"/>
     <p:sldId id="403" r:id="rId3"/>
     <p:sldId id="400" r:id="rId4"/>
+    <p:sldId id="407" r:id="rId5"/>
+    <p:sldId id="404" r:id="rId6"/>
+    <p:sldId id="405" r:id="rId7"/>
+    <p:sldId id="406" r:id="rId8"/>
   </p:sldIdLst>
   <p:sldSz cx="12192000" cy="6858000"/>
   <p:notesSz cx="6858000" cy="9144000"/>
@@ -261,7 +265,7 @@
           <a:p>
             <a:fld id="{3E102D2E-813C-461C-9963-687A650C48C0}" type="datetimeFigureOut">
               <a:rPr lang="en-US" smtClean="0"/>
-              <a:t>5/23/2025</a:t>
+              <a:t>5/24/2025</a:t>
             </a:fld>
             <a:endParaRPr lang="en-US"/>
           </a:p>
@@ -459,7 +463,7 @@
           <a:p>
             <a:fld id="{3E102D2E-813C-461C-9963-687A650C48C0}" type="datetimeFigureOut">
               <a:rPr lang="en-US" smtClean="0"/>
-              <a:t>5/23/2025</a:t>
+              <a:t>5/24/2025</a:t>
             </a:fld>
             <a:endParaRPr lang="en-US"/>
           </a:p>
@@ -667,7 +671,7 @@
           <a:p>
             <a:fld id="{3E102D2E-813C-461C-9963-687A650C48C0}" type="datetimeFigureOut">
               <a:rPr lang="en-US" smtClean="0"/>
-              <a:t>5/23/2025</a:t>
+              <a:t>5/24/2025</a:t>
             </a:fld>
             <a:endParaRPr lang="en-US"/>
           </a:p>
@@ -865,7 +869,7 @@
           <a:p>
             <a:fld id="{3E102D2E-813C-461C-9963-687A650C48C0}" type="datetimeFigureOut">
               <a:rPr lang="en-US" smtClean="0"/>
-              <a:t>5/23/2025</a:t>
+              <a:t>5/24/2025</a:t>
             </a:fld>
             <a:endParaRPr lang="en-US"/>
           </a:p>
@@ -1140,7 +1144,7 @@
           <a:p>
             <a:fld id="{3E102D2E-813C-461C-9963-687A650C48C0}" type="datetimeFigureOut">
               <a:rPr lang="en-US" smtClean="0"/>
-              <a:t>5/23/2025</a:t>
+              <a:t>5/24/2025</a:t>
             </a:fld>
             <a:endParaRPr lang="en-US"/>
           </a:p>
@@ -1405,7 +1409,7 @@
           <a:p>
             <a:fld id="{3E102D2E-813C-461C-9963-687A650C48C0}" type="datetimeFigureOut">
               <a:rPr lang="en-US" smtClean="0"/>
-              <a:t>5/23/2025</a:t>
+              <a:t>5/24/2025</a:t>
             </a:fld>
             <a:endParaRPr lang="en-US"/>
           </a:p>
@@ -1817,7 +1821,7 @@
           <a:p>
             <a:fld id="{3E102D2E-813C-461C-9963-687A650C48C0}" type="datetimeFigureOut">
               <a:rPr lang="en-US" smtClean="0"/>
-              <a:t>5/23/2025</a:t>
+              <a:t>5/24/2025</a:t>
             </a:fld>
             <a:endParaRPr lang="en-US"/>
           </a:p>
@@ -1958,7 +1962,7 @@
           <a:p>
             <a:fld id="{3E102D2E-813C-461C-9963-687A650C48C0}" type="datetimeFigureOut">
               <a:rPr lang="en-US" smtClean="0"/>
-              <a:t>5/23/2025</a:t>
+              <a:t>5/24/2025</a:t>
             </a:fld>
             <a:endParaRPr lang="en-US"/>
           </a:p>
@@ -2071,7 +2075,7 @@
           <a:p>
             <a:fld id="{3E102D2E-813C-461C-9963-687A650C48C0}" type="datetimeFigureOut">
               <a:rPr lang="en-US" smtClean="0"/>
-              <a:t>5/23/2025</a:t>
+              <a:t>5/24/2025</a:t>
             </a:fld>
             <a:endParaRPr lang="en-US"/>
           </a:p>
@@ -2382,7 +2386,7 @@
           <a:p>
             <a:fld id="{3E102D2E-813C-461C-9963-687A650C48C0}" type="datetimeFigureOut">
               <a:rPr lang="en-US" smtClean="0"/>
-              <a:t>5/23/2025</a:t>
+              <a:t>5/24/2025</a:t>
             </a:fld>
             <a:endParaRPr lang="en-US"/>
           </a:p>
@@ -2670,7 +2674,7 @@
           <a:p>
             <a:fld id="{3E102D2E-813C-461C-9963-687A650C48C0}" type="datetimeFigureOut">
               <a:rPr lang="en-US" smtClean="0"/>
-              <a:t>5/23/2025</a:t>
+              <a:t>5/24/2025</a:t>
             </a:fld>
             <a:endParaRPr lang="en-US"/>
           </a:p>
@@ -2911,7 +2915,7 @@
           <a:p>
             <a:fld id="{3E102D2E-813C-461C-9963-687A650C48C0}" type="datetimeFigureOut">
               <a:rPr lang="en-US" smtClean="0"/>
-              <a:t>5/23/2025</a:t>
+              <a:t>5/24/2025</a:t>
             </a:fld>
             <a:endParaRPr lang="en-US"/>
           </a:p>
@@ -3369,21 +3373,66 @@
               <a:buNone/>
             </a:pPr>
             <a:r>
-              <a:rPr kumimoji="0" lang="en-US" altLang="en-US" sz="1300" b="0" i="0" u="none" strike="noStrike" cap="none" normalizeH="0" baseline="0">
-                <a:ln>
-                  <a:noFill/>
-                </a:ln>
-                <a:solidFill>
-                  <a:schemeClr val="tx1"/>
-                </a:solidFill>
-                <a:effectLst/>
+              <a:rPr lang="az-Latn-AZ" altLang="en-US" sz="1300">
                 <a:latin typeface="Arial" panose="020B0604020202020204" pitchFamily="34" charset="0"/>
               </a:rPr>
-              <a:t>.</a:t>
-            </a:r>
-          </a:p>
-        </p:txBody>
-      </p:sp>
+              <a:t>Əgər controller səviyyəsində </a:t>
+            </a:r>
+            <a:r>
+              <a:rPr lang="en-US" altLang="en-US" sz="1300">
+                <a:latin typeface="Arial" panose="020B0604020202020204" pitchFamily="34" charset="0"/>
+              </a:rPr>
+              <a:t>middleware </a:t>
+            </a:r>
+            <a:r>
+              <a:rPr lang="az-Latn-AZ" altLang="en-US" sz="1300">
+                <a:latin typeface="Arial" panose="020B0604020202020204" pitchFamily="34" charset="0"/>
+              </a:rPr>
+              <a:t>tətbiq etmək istəyiriksə onda aşağıdakı kimi yazırıq. </a:t>
+            </a:r>
+            <a:endParaRPr kumimoji="0" lang="en-US" altLang="en-US" sz="1300" b="0" i="0" u="none" strike="noStrike" cap="none" normalizeH="0" baseline="0">
+              <a:ln>
+                <a:noFill/>
+              </a:ln>
+              <a:solidFill>
+                <a:schemeClr val="tx1"/>
+              </a:solidFill>
+              <a:effectLst/>
+              <a:latin typeface="Arial" panose="020B0604020202020204" pitchFamily="34" charset="0"/>
+            </a:endParaRPr>
+          </a:p>
+        </p:txBody>
+      </p:sp>
+      <p:pic>
+        <p:nvPicPr>
+          <p:cNvPr id="4" name="Picture 3">
+            <a:extLst>
+              <a:ext uri="{FF2B5EF4-FFF2-40B4-BE49-F238E27FC236}">
+                <a16:creationId xmlns:a16="http://schemas.microsoft.com/office/drawing/2014/main" id="{052A007A-71BB-5640-4F10-98EE58CC3938}"/>
+              </a:ext>
+            </a:extLst>
+          </p:cNvPr>
+          <p:cNvPicPr>
+            <a:picLocks noChangeAspect="1"/>
+          </p:cNvPicPr>
+          <p:nvPr/>
+        </p:nvPicPr>
+        <p:blipFill>
+          <a:blip r:embed="rId2"/>
+          <a:stretch>
+            <a:fillRect/>
+          </a:stretch>
+        </p:blipFill>
+        <p:spPr>
+          <a:xfrm>
+            <a:off x="0" y="765241"/>
+            <a:ext cx="12192000" cy="6092759"/>
+          </a:xfrm>
+          <a:prstGeom prst="rect">
+            <a:avLst/>
+          </a:prstGeom>
+        </p:spPr>
+      </p:pic>
     </p:spTree>
     <p:extLst>
       <p:ext uri="{BB962C8B-B14F-4D97-AF65-F5344CB8AC3E}">
@@ -3434,8 +3483,8 @@
         </p:nvSpPr>
         <p:spPr>
           <a:xfrm>
-            <a:off x="217714" y="255046"/>
-            <a:ext cx="11756571" cy="355354"/>
+            <a:off x="217715" y="255046"/>
+            <a:ext cx="7286022" cy="955518"/>
           </a:xfrm>
           <a:prstGeom prst="rect">
             <a:avLst/>
@@ -3455,21 +3504,174 @@
               <a:buNone/>
             </a:pPr>
             <a:r>
-              <a:rPr kumimoji="0" lang="en-US" altLang="en-US" sz="1300" b="0" i="0" u="none" strike="noStrike" cap="none" normalizeH="0" baseline="0">
-                <a:ln>
-                  <a:noFill/>
-                </a:ln>
-                <a:solidFill>
-                  <a:schemeClr val="tx1"/>
-                </a:solidFill>
-                <a:effectLst/>
+              <a:rPr lang="az-Latn-AZ" altLang="en-US" sz="1300">
                 <a:latin typeface="Arial" panose="020B0604020202020204" pitchFamily="34" charset="0"/>
               </a:rPr>
-              <a:t>.</a:t>
-            </a:r>
-          </a:p>
-        </p:txBody>
-      </p:sp>
+              <a:t>Əgər bütün </a:t>
+            </a:r>
+            <a:r>
+              <a:rPr lang="az-Latn-AZ" altLang="en-US" sz="1300" b="1">
+                <a:latin typeface="Arial" panose="020B0604020202020204" pitchFamily="34" charset="0"/>
+              </a:rPr>
+              <a:t>route</a:t>
+            </a:r>
+            <a:r>
+              <a:rPr lang="az-Latn-AZ" altLang="en-US" sz="1300">
+                <a:latin typeface="Arial" panose="020B0604020202020204" pitchFamily="34" charset="0"/>
+              </a:rPr>
+              <a:t> -lara yox sadəcə məsələn </a:t>
+            </a:r>
+            <a:r>
+              <a:rPr lang="az-Latn-AZ" altLang="en-US" sz="1300" b="1">
+                <a:solidFill>
+                  <a:srgbClr val="00B050"/>
+                </a:solidFill>
+                <a:latin typeface="Arial" panose="020B0604020202020204" pitchFamily="34" charset="0"/>
+              </a:rPr>
+              <a:t>CREATE</a:t>
+            </a:r>
+            <a:r>
+              <a:rPr lang="az-Latn-AZ" altLang="en-US" sz="1300">
+                <a:latin typeface="Arial" panose="020B0604020202020204" pitchFamily="34" charset="0"/>
+              </a:rPr>
+              <a:t> ilə əlaqəli </a:t>
+            </a:r>
+            <a:r>
+              <a:rPr lang="az-Latn-AZ" altLang="en-US" sz="1300" b="1">
+                <a:latin typeface="Arial" panose="020B0604020202020204" pitchFamily="34" charset="0"/>
+              </a:rPr>
+              <a:t>route</a:t>
+            </a:r>
+            <a:r>
+              <a:rPr lang="az-Latn-AZ" altLang="en-US" sz="1300">
+                <a:latin typeface="Arial" panose="020B0604020202020204" pitchFamily="34" charset="0"/>
+              </a:rPr>
+              <a:t> -a </a:t>
+            </a:r>
+            <a:r>
+              <a:rPr lang="en-US" altLang="en-US" sz="1300" b="1">
+                <a:latin typeface="Arial" panose="020B0604020202020204" pitchFamily="34" charset="0"/>
+              </a:rPr>
+              <a:t>middleware</a:t>
+            </a:r>
+            <a:r>
+              <a:rPr lang="en-US" altLang="en-US" sz="1300">
+                <a:latin typeface="Arial" panose="020B0604020202020204" pitchFamily="34" charset="0"/>
+              </a:rPr>
+              <a:t> </a:t>
+            </a:r>
+            <a:r>
+              <a:rPr lang="az-Latn-AZ" altLang="en-US" sz="1300">
+                <a:latin typeface="Arial" panose="020B0604020202020204" pitchFamily="34" charset="0"/>
+              </a:rPr>
+              <a:t>tətbiq etmək istəyiriksə onda </a:t>
+            </a:r>
+            <a:r>
+              <a:rPr lang="az-Latn-AZ" altLang="en-US" sz="1300" b="1">
+                <a:solidFill>
+                  <a:srgbClr val="FF0000"/>
+                </a:solidFill>
+                <a:latin typeface="Arial" panose="020B0604020202020204" pitchFamily="34" charset="0"/>
+              </a:rPr>
+              <a:t>only() </a:t>
+            </a:r>
+            <a:r>
+              <a:rPr lang="az-Latn-AZ" altLang="en-US" sz="1300">
+                <a:latin typeface="Arial" panose="020B0604020202020204" pitchFamily="34" charset="0"/>
+              </a:rPr>
+              <a:t>metodunu əlavə edərək həmin </a:t>
+            </a:r>
+            <a:r>
+              <a:rPr lang="az-Latn-AZ" altLang="en-US" sz="1300" b="1">
+                <a:latin typeface="Arial" panose="020B0604020202020204" pitchFamily="34" charset="0"/>
+              </a:rPr>
+              <a:t>metodun</a:t>
+            </a:r>
+            <a:r>
+              <a:rPr lang="az-Latn-AZ" altLang="en-US" sz="1300">
+                <a:latin typeface="Arial" panose="020B0604020202020204" pitchFamily="34" charset="0"/>
+              </a:rPr>
+              <a:t> </a:t>
+            </a:r>
+            <a:r>
+              <a:rPr lang="az-Latn-AZ" altLang="en-US" sz="1300" b="1">
+                <a:latin typeface="Arial" panose="020B0604020202020204" pitchFamily="34" charset="0"/>
+              </a:rPr>
+              <a:t>adını</a:t>
+            </a:r>
+            <a:r>
+              <a:rPr lang="az-Latn-AZ" altLang="en-US" sz="1300">
+                <a:latin typeface="Arial" panose="020B0604020202020204" pitchFamily="34" charset="0"/>
+              </a:rPr>
+              <a:t> bu </a:t>
+            </a:r>
+            <a:r>
+              <a:rPr lang="az-Latn-AZ" altLang="en-US" sz="1300" b="1">
+                <a:latin typeface="Arial" panose="020B0604020202020204" pitchFamily="34" charset="0"/>
+              </a:rPr>
+              <a:t>only() </a:t>
+            </a:r>
+            <a:r>
+              <a:rPr lang="az-Latn-AZ" altLang="en-US" sz="1300">
+                <a:latin typeface="Arial" panose="020B0604020202020204" pitchFamily="34" charset="0"/>
+              </a:rPr>
+              <a:t>funksiyanın içində </a:t>
+            </a:r>
+            <a:r>
+              <a:rPr lang="az-Latn-AZ" altLang="en-US" sz="1300" b="1">
+                <a:latin typeface="Arial" panose="020B0604020202020204" pitchFamily="34" charset="0"/>
+              </a:rPr>
+              <a:t>string</a:t>
+            </a:r>
+            <a:r>
+              <a:rPr lang="az-Latn-AZ" altLang="en-US" sz="1300">
+                <a:latin typeface="Arial" panose="020B0604020202020204" pitchFamily="34" charset="0"/>
+              </a:rPr>
+              <a:t> kimi yazmaq lazımdır. </a:t>
+            </a:r>
+            <a:endParaRPr kumimoji="0" lang="en-US" altLang="en-US" sz="1300" b="0" i="0" u="none" strike="noStrike" cap="none" normalizeH="0" baseline="0">
+              <a:ln>
+                <a:noFill/>
+              </a:ln>
+              <a:solidFill>
+                <a:schemeClr val="tx1"/>
+              </a:solidFill>
+              <a:effectLst/>
+              <a:latin typeface="Arial" panose="020B0604020202020204" pitchFamily="34" charset="0"/>
+            </a:endParaRPr>
+          </a:p>
+        </p:txBody>
+      </p:sp>
+      <p:pic>
+        <p:nvPicPr>
+          <p:cNvPr id="4" name="Picture 3">
+            <a:extLst>
+              <a:ext uri="{FF2B5EF4-FFF2-40B4-BE49-F238E27FC236}">
+                <a16:creationId xmlns:a16="http://schemas.microsoft.com/office/drawing/2014/main" id="{38EE2FF8-873B-42FF-FFC3-B0F86CCFB6DB}"/>
+              </a:ext>
+            </a:extLst>
+          </p:cNvPr>
+          <p:cNvPicPr>
+            <a:picLocks noChangeAspect="1"/>
+          </p:cNvPicPr>
+          <p:nvPr/>
+        </p:nvPicPr>
+        <p:blipFill>
+          <a:blip r:embed="rId2"/>
+          <a:stretch>
+            <a:fillRect/>
+          </a:stretch>
+        </p:blipFill>
+        <p:spPr>
+          <a:xfrm>
+            <a:off x="7682237" y="0"/>
+            <a:ext cx="4509763" cy="6858000"/>
+          </a:xfrm>
+          <a:prstGeom prst="rect">
+            <a:avLst/>
+          </a:prstGeom>
+        </p:spPr>
+      </p:pic>
     </p:spTree>
     <p:extLst>
       <p:ext uri="{BB962C8B-B14F-4D97-AF65-F5344CB8AC3E}">
@@ -3541,6 +3743,520 @@
               <a:buNone/>
             </a:pPr>
             <a:r>
+              <a:rPr lang="en-US" altLang="en-US" sz="1300">
+                <a:latin typeface="Arial" panose="020B0604020202020204" pitchFamily="34" charset="0"/>
+              </a:rPr>
+              <a:t>Bu </a:t>
+            </a:r>
+            <a:r>
+              <a:rPr lang="en-US" altLang="en-US" sz="1300" b="1">
+                <a:latin typeface="Arial" panose="020B0604020202020204" pitchFamily="34" charset="0"/>
+              </a:rPr>
+              <a:t>route</a:t>
+            </a:r>
+            <a:r>
+              <a:rPr lang="az-Latn-AZ" altLang="en-US" sz="1300" b="1">
+                <a:latin typeface="Arial" panose="020B0604020202020204" pitchFamily="34" charset="0"/>
+              </a:rPr>
+              <a:t> -a</a:t>
+            </a:r>
+            <a:r>
+              <a:rPr lang="en-US" altLang="en-US" sz="1300">
+                <a:latin typeface="Arial" panose="020B0604020202020204" pitchFamily="34" charset="0"/>
+              </a:rPr>
+              <a:t> ancaq a</a:t>
+            </a:r>
+            <a:r>
+              <a:rPr lang="az-Latn-AZ" altLang="en-US" sz="1300">
+                <a:latin typeface="Arial" panose="020B0604020202020204" pitchFamily="34" charset="0"/>
+              </a:rPr>
+              <a:t>şağı şəkildə olduğu kimi yazdıqda daxil olmaq mümkün olacaq</a:t>
+            </a:r>
+            <a:endParaRPr kumimoji="0" lang="en-US" altLang="en-US" sz="1300" b="0" i="0" u="none" strike="noStrike" cap="none" normalizeH="0" baseline="0">
+              <a:ln>
+                <a:noFill/>
+              </a:ln>
+              <a:solidFill>
+                <a:schemeClr val="tx1"/>
+              </a:solidFill>
+              <a:effectLst/>
+              <a:latin typeface="Arial" panose="020B0604020202020204" pitchFamily="34" charset="0"/>
+            </a:endParaRPr>
+          </a:p>
+        </p:txBody>
+      </p:sp>
+      <p:pic>
+        <p:nvPicPr>
+          <p:cNvPr id="4" name="Picture 3">
+            <a:extLst>
+              <a:ext uri="{FF2B5EF4-FFF2-40B4-BE49-F238E27FC236}">
+                <a16:creationId xmlns:a16="http://schemas.microsoft.com/office/drawing/2014/main" id="{2DCD8E98-1754-BF13-874D-3F4D7A07DA97}"/>
+              </a:ext>
+            </a:extLst>
+          </p:cNvPr>
+          <p:cNvPicPr>
+            <a:picLocks noChangeAspect="1"/>
+          </p:cNvPicPr>
+          <p:nvPr/>
+        </p:nvPicPr>
+        <p:blipFill>
+          <a:blip r:embed="rId2"/>
+          <a:stretch>
+            <a:fillRect/>
+          </a:stretch>
+        </p:blipFill>
+        <p:spPr>
+          <a:xfrm>
+            <a:off x="0" y="989200"/>
+            <a:ext cx="12192000" cy="5868800"/>
+          </a:xfrm>
+          <a:prstGeom prst="rect">
+            <a:avLst/>
+          </a:prstGeom>
+          <a:ln w="38100" cap="sq">
+            <a:solidFill>
+              <a:srgbClr val="000000"/>
+            </a:solidFill>
+            <a:prstDash val="solid"/>
+            <a:miter lim="800000"/>
+          </a:ln>
+          <a:effectLst>
+            <a:outerShdw blurRad="50800" dist="38100" dir="2700000" algn="tl" rotWithShape="0">
+              <a:srgbClr val="000000">
+                <a:alpha val="43000"/>
+              </a:srgbClr>
+            </a:outerShdw>
+          </a:effectLst>
+        </p:spPr>
+      </p:pic>
+    </p:spTree>
+    <p:extLst>
+      <p:ext uri="{BB962C8B-B14F-4D97-AF65-F5344CB8AC3E}">
+        <p14:creationId xmlns:p14="http://schemas.microsoft.com/office/powerpoint/2010/main" val="3095838342"/>
+      </p:ext>
+    </p:extLst>
+  </p:cSld>
+  <p:clrMapOvr>
+    <a:masterClrMapping/>
+  </p:clrMapOvr>
+</p:sld>
+</file>
+
+<file path=ppt/slides/slide4.xml><?xml version="1.0" encoding="utf-8"?>
+<p:sld xmlns:a="http://schemas.openxmlformats.org/drawingml/2006/main" xmlns:r="http://schemas.openxmlformats.org/officeDocument/2006/relationships" xmlns:p="http://schemas.openxmlformats.org/presentationml/2006/main">
+  <p:cSld>
+    <p:spTree>
+      <p:nvGrpSpPr>
+        <p:cNvPr id="1" name="">
+          <a:extLst>
+            <a:ext uri="{FF2B5EF4-FFF2-40B4-BE49-F238E27FC236}">
+              <a16:creationId xmlns:a16="http://schemas.microsoft.com/office/drawing/2014/main" id="{5AEEFDA9-2843-D24B-5EFA-1F1019FB4CB6}"/>
+            </a:ext>
+          </a:extLst>
+        </p:cNvPr>
+        <p:cNvGrpSpPr/>
+        <p:nvPr/>
+      </p:nvGrpSpPr>
+      <p:grpSpPr>
+        <a:xfrm>
+          <a:off x="0" y="0"/>
+          <a:ext cx="0" cy="0"/>
+          <a:chOff x="0" y="0"/>
+          <a:chExt cx="0" cy="0"/>
+        </a:xfrm>
+      </p:grpSpPr>
+      <p:sp>
+        <p:nvSpPr>
+          <p:cNvPr id="3" name="TextBox 2">
+            <a:extLst>
+              <a:ext uri="{FF2B5EF4-FFF2-40B4-BE49-F238E27FC236}">
+                <a16:creationId xmlns:a16="http://schemas.microsoft.com/office/drawing/2014/main" id="{4FFA8A77-A49E-E568-4B70-3D7237513FAC}"/>
+              </a:ext>
+            </a:extLst>
+          </p:cNvPr>
+          <p:cNvSpPr txBox="1"/>
+          <p:nvPr/>
+        </p:nvSpPr>
+        <p:spPr>
+          <a:xfrm>
+            <a:off x="217714" y="255046"/>
+            <a:ext cx="7182327" cy="655436"/>
+          </a:xfrm>
+          <a:prstGeom prst="rect">
+            <a:avLst/>
+          </a:prstGeom>
+          <a:noFill/>
+        </p:spPr>
+        <p:txBody>
+          <a:bodyPr wrap="square">
+            <a:spAutoFit/>
+          </a:bodyPr>
+          <a:lstStyle/>
+          <a:p>
+            <a:pPr>
+              <a:lnSpc>
+                <a:spcPct val="150000"/>
+              </a:lnSpc>
+              <a:buNone/>
+            </a:pPr>
+            <a:r>
+              <a:rPr kumimoji="0" lang="az-Latn-AZ" altLang="en-US" sz="1300" b="0" i="0" u="none" strike="noStrike" cap="none" normalizeH="0" baseline="0">
+                <a:ln>
+                  <a:noFill/>
+                </a:ln>
+                <a:solidFill>
+                  <a:schemeClr val="tx1"/>
+                </a:solidFill>
+                <a:effectLst/>
+                <a:latin typeface="Arial" panose="020B0604020202020204" pitchFamily="34" charset="0"/>
+              </a:rPr>
+              <a:t>Əgər bir neçə route üçün </a:t>
+            </a:r>
+            <a:r>
+              <a:rPr kumimoji="0" lang="en-US" altLang="en-US" sz="1300" b="0" i="0" u="none" strike="noStrike" cap="none" normalizeH="0" baseline="0">
+                <a:ln>
+                  <a:noFill/>
+                </a:ln>
+                <a:solidFill>
+                  <a:schemeClr val="tx1"/>
+                </a:solidFill>
+                <a:effectLst/>
+                <a:latin typeface="Arial" panose="020B0604020202020204" pitchFamily="34" charset="0"/>
+              </a:rPr>
+              <a:t>middleware </a:t>
+            </a:r>
+            <a:r>
+              <a:rPr kumimoji="0" lang="az-Latn-AZ" altLang="en-US" sz="1300" b="0" i="0" u="none" strike="noStrike" cap="none" normalizeH="0" baseline="0">
+                <a:ln>
+                  <a:noFill/>
+                </a:ln>
+                <a:solidFill>
+                  <a:schemeClr val="tx1"/>
+                </a:solidFill>
+                <a:effectLst/>
+                <a:latin typeface="Arial" panose="020B0604020202020204" pitchFamily="34" charset="0"/>
+              </a:rPr>
+              <a:t>tətbiq etmək lazımdırsa onda metodların adlarını, </a:t>
+            </a:r>
+            <a:r>
+              <a:rPr kumimoji="0" lang="az-Latn-AZ" altLang="en-US" sz="1300" b="1" i="0" u="none" strike="noStrike" cap="none" normalizeH="0" baseline="0">
+                <a:ln>
+                  <a:noFill/>
+                </a:ln>
+                <a:solidFill>
+                  <a:srgbClr val="FF0000"/>
+                </a:solidFill>
+                <a:effectLst/>
+                <a:latin typeface="Arial" panose="020B0604020202020204" pitchFamily="34" charset="0"/>
+              </a:rPr>
+              <a:t>array</a:t>
+            </a:r>
+            <a:r>
+              <a:rPr kumimoji="0" lang="az-Latn-AZ" altLang="en-US" sz="1300" b="0" i="0" u="none" strike="noStrike" cap="none" normalizeH="0" baseline="0">
+                <a:ln>
+                  <a:noFill/>
+                </a:ln>
+                <a:solidFill>
+                  <a:schemeClr val="tx1"/>
+                </a:solidFill>
+                <a:effectLst/>
+                <a:latin typeface="Arial" panose="020B0604020202020204" pitchFamily="34" charset="0"/>
+              </a:rPr>
+              <a:t> içində sadalamaq lazımdır. </a:t>
+            </a:r>
+            <a:endParaRPr kumimoji="0" lang="en-US" altLang="en-US" sz="1300" b="0" i="0" u="none" strike="noStrike" cap="none" normalizeH="0" baseline="0">
+              <a:ln>
+                <a:noFill/>
+              </a:ln>
+              <a:solidFill>
+                <a:schemeClr val="tx1"/>
+              </a:solidFill>
+              <a:effectLst/>
+              <a:latin typeface="Arial" panose="020B0604020202020204" pitchFamily="34" charset="0"/>
+            </a:endParaRPr>
+          </a:p>
+        </p:txBody>
+      </p:sp>
+      <p:pic>
+        <p:nvPicPr>
+          <p:cNvPr id="4" name="Picture 3">
+            <a:extLst>
+              <a:ext uri="{FF2B5EF4-FFF2-40B4-BE49-F238E27FC236}">
+                <a16:creationId xmlns:a16="http://schemas.microsoft.com/office/drawing/2014/main" id="{77FD6107-6212-DB85-699D-9A7509E6F181}"/>
+              </a:ext>
+            </a:extLst>
+          </p:cNvPr>
+          <p:cNvPicPr>
+            <a:picLocks noChangeAspect="1"/>
+          </p:cNvPicPr>
+          <p:nvPr/>
+        </p:nvPicPr>
+        <p:blipFill>
+          <a:blip r:embed="rId2"/>
+          <a:stretch>
+            <a:fillRect/>
+          </a:stretch>
+        </p:blipFill>
+        <p:spPr>
+          <a:xfrm>
+            <a:off x="7667874" y="-11784"/>
+            <a:ext cx="4524126" cy="6858000"/>
+          </a:xfrm>
+          <a:prstGeom prst="rect">
+            <a:avLst/>
+          </a:prstGeom>
+        </p:spPr>
+      </p:pic>
+    </p:spTree>
+    <p:extLst>
+      <p:ext uri="{BB962C8B-B14F-4D97-AF65-F5344CB8AC3E}">
+        <p14:creationId xmlns:p14="http://schemas.microsoft.com/office/powerpoint/2010/main" val="4203342001"/>
+      </p:ext>
+    </p:extLst>
+  </p:cSld>
+  <p:clrMapOvr>
+    <a:masterClrMapping/>
+  </p:clrMapOvr>
+</p:sld>
+</file>
+
+<file path=ppt/slides/slide5.xml><?xml version="1.0" encoding="utf-8"?>
+<p:sld xmlns:a="http://schemas.openxmlformats.org/drawingml/2006/main" xmlns:r="http://schemas.openxmlformats.org/officeDocument/2006/relationships" xmlns:p="http://schemas.openxmlformats.org/presentationml/2006/main">
+  <p:cSld>
+    <p:spTree>
+      <p:nvGrpSpPr>
+        <p:cNvPr id="1" name="">
+          <a:extLst>
+            <a:ext uri="{FF2B5EF4-FFF2-40B4-BE49-F238E27FC236}">
+              <a16:creationId xmlns:a16="http://schemas.microsoft.com/office/drawing/2014/main" id="{E5127769-FC42-3F1B-BBE8-58220F844F66}"/>
+            </a:ext>
+          </a:extLst>
+        </p:cNvPr>
+        <p:cNvGrpSpPr/>
+        <p:nvPr/>
+      </p:nvGrpSpPr>
+      <p:grpSpPr>
+        <a:xfrm>
+          <a:off x="0" y="0"/>
+          <a:ext cx="0" cy="0"/>
+          <a:chOff x="0" y="0"/>
+          <a:chExt cx="0" cy="0"/>
+        </a:xfrm>
+      </p:grpSpPr>
+      <p:sp>
+        <p:nvSpPr>
+          <p:cNvPr id="3" name="TextBox 2">
+            <a:extLst>
+              <a:ext uri="{FF2B5EF4-FFF2-40B4-BE49-F238E27FC236}">
+                <a16:creationId xmlns:a16="http://schemas.microsoft.com/office/drawing/2014/main" id="{4FF8D051-0065-3DC8-858F-E0F443F2C5A5}"/>
+              </a:ext>
+            </a:extLst>
+          </p:cNvPr>
+          <p:cNvSpPr txBox="1"/>
+          <p:nvPr/>
+        </p:nvSpPr>
+        <p:spPr>
+          <a:xfrm>
+            <a:off x="217714" y="255046"/>
+            <a:ext cx="7644241" cy="655436"/>
+          </a:xfrm>
+          <a:prstGeom prst="rect">
+            <a:avLst/>
+          </a:prstGeom>
+          <a:noFill/>
+        </p:spPr>
+        <p:txBody>
+          <a:bodyPr wrap="square">
+            <a:spAutoFit/>
+          </a:bodyPr>
+          <a:lstStyle/>
+          <a:p>
+            <a:pPr>
+              <a:lnSpc>
+                <a:spcPct val="150000"/>
+              </a:lnSpc>
+              <a:buNone/>
+            </a:pPr>
+            <a:r>
+              <a:rPr lang="az-Latn-AZ" altLang="en-US" sz="1300">
+                <a:latin typeface="Arial" panose="020B0604020202020204" pitchFamily="34" charset="0"/>
+              </a:rPr>
+              <a:t>Yaxud </a:t>
+            </a:r>
+            <a:r>
+              <a:rPr lang="az-Latn-AZ" altLang="en-US" sz="1300" b="1">
+                <a:solidFill>
+                  <a:srgbClr val="FF0000"/>
+                </a:solidFill>
+                <a:latin typeface="Arial" panose="020B0604020202020204" pitchFamily="34" charset="0"/>
+              </a:rPr>
+              <a:t>EXCEPT() </a:t>
+            </a:r>
+            <a:r>
+              <a:rPr lang="az-Latn-AZ" altLang="en-US" sz="1300">
+                <a:latin typeface="Arial" panose="020B0604020202020204" pitchFamily="34" charset="0"/>
+              </a:rPr>
+              <a:t>funksiyası ilə deyə bilərik ki, </a:t>
+            </a:r>
+            <a:r>
+              <a:rPr lang="az-Latn-AZ" altLang="en-US" sz="1300" b="1">
+                <a:latin typeface="Arial" panose="020B0604020202020204" pitchFamily="34" charset="0"/>
+              </a:rPr>
+              <a:t>İNDEX</a:t>
+            </a:r>
+            <a:r>
+              <a:rPr lang="az-Latn-AZ" altLang="en-US" sz="1300">
+                <a:latin typeface="Arial" panose="020B0604020202020204" pitchFamily="34" charset="0"/>
+              </a:rPr>
+              <a:t> şablonu </a:t>
+            </a:r>
+            <a:r>
+              <a:rPr lang="az-Latn-AZ" altLang="en-US" sz="1300" b="1" i="1">
+                <a:solidFill>
+                  <a:srgbClr val="0070C0"/>
+                </a:solidFill>
+                <a:latin typeface="Arial" panose="020B0604020202020204" pitchFamily="34" charset="0"/>
+              </a:rPr>
+              <a:t>istisna olmaqla </a:t>
+            </a:r>
+            <a:r>
+              <a:rPr lang="az-Latn-AZ" altLang="en-US" sz="1300">
+                <a:latin typeface="Arial" panose="020B0604020202020204" pitchFamily="34" charset="0"/>
+              </a:rPr>
+              <a:t>yerdə qalan digər şablonlara </a:t>
+            </a:r>
+            <a:r>
+              <a:rPr lang="en-US" altLang="en-US" sz="1300" b="1">
+                <a:latin typeface="Arial" panose="020B0604020202020204" pitchFamily="34" charset="0"/>
+              </a:rPr>
+              <a:t>middleware</a:t>
+            </a:r>
+            <a:r>
+              <a:rPr lang="en-US" altLang="en-US" sz="1300">
+                <a:latin typeface="Arial" panose="020B0604020202020204" pitchFamily="34" charset="0"/>
+              </a:rPr>
+              <a:t> </a:t>
+            </a:r>
+            <a:r>
+              <a:rPr lang="az-Latn-AZ" altLang="en-US" sz="1300">
+                <a:latin typeface="Arial" panose="020B0604020202020204" pitchFamily="34" charset="0"/>
+              </a:rPr>
+              <a:t>tətbiq edilsin.</a:t>
+            </a:r>
+            <a:endParaRPr kumimoji="0" lang="en-US" altLang="en-US" sz="1300" b="0" i="0" u="none" strike="noStrike" cap="none" normalizeH="0" baseline="0">
+              <a:ln>
+                <a:noFill/>
+              </a:ln>
+              <a:solidFill>
+                <a:schemeClr val="tx1"/>
+              </a:solidFill>
+              <a:effectLst/>
+              <a:latin typeface="Arial" panose="020B0604020202020204" pitchFamily="34" charset="0"/>
+            </a:endParaRPr>
+          </a:p>
+        </p:txBody>
+      </p:sp>
+      <p:pic>
+        <p:nvPicPr>
+          <p:cNvPr id="5" name="Picture 4">
+            <a:extLst>
+              <a:ext uri="{FF2B5EF4-FFF2-40B4-BE49-F238E27FC236}">
+                <a16:creationId xmlns:a16="http://schemas.microsoft.com/office/drawing/2014/main" id="{92797D8A-3521-EDB0-4402-5B02178139D2}"/>
+              </a:ext>
+            </a:extLst>
+          </p:cNvPr>
+          <p:cNvPicPr>
+            <a:picLocks noChangeAspect="1"/>
+          </p:cNvPicPr>
+          <p:nvPr/>
+        </p:nvPicPr>
+        <p:blipFill>
+          <a:blip r:embed="rId2"/>
+          <a:stretch>
+            <a:fillRect/>
+          </a:stretch>
+        </p:blipFill>
+        <p:spPr>
+          <a:xfrm>
+            <a:off x="8078626" y="0"/>
+            <a:ext cx="4113374" cy="6858000"/>
+          </a:xfrm>
+          <a:prstGeom prst="rect">
+            <a:avLst/>
+          </a:prstGeom>
+        </p:spPr>
+      </p:pic>
+    </p:spTree>
+    <p:extLst>
+      <p:ext uri="{BB962C8B-B14F-4D97-AF65-F5344CB8AC3E}">
+        <p14:creationId xmlns:p14="http://schemas.microsoft.com/office/powerpoint/2010/main" val="2734681332"/>
+      </p:ext>
+    </p:extLst>
+  </p:cSld>
+  <p:clrMapOvr>
+    <a:masterClrMapping/>
+  </p:clrMapOvr>
+</p:sld>
+</file>
+
+<file path=ppt/slides/slide6.xml><?xml version="1.0" encoding="utf-8"?>
+<p:sld xmlns:a="http://schemas.openxmlformats.org/drawingml/2006/main" xmlns:r="http://schemas.openxmlformats.org/officeDocument/2006/relationships" xmlns:p="http://schemas.openxmlformats.org/presentationml/2006/main">
+  <p:cSld>
+    <p:spTree>
+      <p:nvGrpSpPr>
+        <p:cNvPr id="1" name="">
+          <a:extLst>
+            <a:ext uri="{FF2B5EF4-FFF2-40B4-BE49-F238E27FC236}">
+              <a16:creationId xmlns:a16="http://schemas.microsoft.com/office/drawing/2014/main" id="{632EC119-AD7A-E3E7-2654-2FF8B8656A6A}"/>
+            </a:ext>
+          </a:extLst>
+        </p:cNvPr>
+        <p:cNvGrpSpPr/>
+        <p:nvPr/>
+      </p:nvGrpSpPr>
+      <p:grpSpPr>
+        <a:xfrm>
+          <a:off x="0" y="0"/>
+          <a:ext cx="0" cy="0"/>
+          <a:chOff x="0" y="0"/>
+          <a:chExt cx="0" cy="0"/>
+        </a:xfrm>
+      </p:grpSpPr>
+      <p:sp>
+        <p:nvSpPr>
+          <p:cNvPr id="3" name="TextBox 2">
+            <a:extLst>
+              <a:ext uri="{FF2B5EF4-FFF2-40B4-BE49-F238E27FC236}">
+                <a16:creationId xmlns:a16="http://schemas.microsoft.com/office/drawing/2014/main" id="{DF34A133-9C59-34DB-C354-3E899767E8A8}"/>
+              </a:ext>
+            </a:extLst>
+          </p:cNvPr>
+          <p:cNvSpPr txBox="1"/>
+          <p:nvPr/>
+        </p:nvSpPr>
+        <p:spPr>
+          <a:xfrm>
+            <a:off x="217714" y="255046"/>
+            <a:ext cx="11756571" cy="355354"/>
+          </a:xfrm>
+          <a:prstGeom prst="rect">
+            <a:avLst/>
+          </a:prstGeom>
+          <a:noFill/>
+        </p:spPr>
+        <p:txBody>
+          <a:bodyPr wrap="square">
+            <a:spAutoFit/>
+          </a:bodyPr>
+          <a:lstStyle/>
+          <a:p>
+            <a:pPr>
+              <a:lnSpc>
+                <a:spcPct val="150000"/>
+              </a:lnSpc>
+              <a:buNone/>
+            </a:pPr>
+            <a:r>
               <a:rPr kumimoji="0" lang="en-US" altLang="en-US" sz="1300" b="0" i="0" u="none" strike="noStrike" cap="none" normalizeH="0" baseline="0">
                 <a:ln>
                   <a:noFill/>
@@ -3559,7 +4275,93 @@
     </p:spTree>
     <p:extLst>
       <p:ext uri="{BB962C8B-B14F-4D97-AF65-F5344CB8AC3E}">
-        <p14:creationId xmlns:p14="http://schemas.microsoft.com/office/powerpoint/2010/main" val="3095838342"/>
+        <p14:creationId xmlns:p14="http://schemas.microsoft.com/office/powerpoint/2010/main" val="1270855736"/>
+      </p:ext>
+    </p:extLst>
+  </p:cSld>
+  <p:clrMapOvr>
+    <a:masterClrMapping/>
+  </p:clrMapOvr>
+</p:sld>
+</file>
+
+<file path=ppt/slides/slide7.xml><?xml version="1.0" encoding="utf-8"?>
+<p:sld xmlns:a="http://schemas.openxmlformats.org/drawingml/2006/main" xmlns:r="http://schemas.openxmlformats.org/officeDocument/2006/relationships" xmlns:p="http://schemas.openxmlformats.org/presentationml/2006/main">
+  <p:cSld>
+    <p:spTree>
+      <p:nvGrpSpPr>
+        <p:cNvPr id="1" name="">
+          <a:extLst>
+            <a:ext uri="{FF2B5EF4-FFF2-40B4-BE49-F238E27FC236}">
+              <a16:creationId xmlns:a16="http://schemas.microsoft.com/office/drawing/2014/main" id="{1D65EF4D-1DEA-8B21-F2AD-52B05CD47486}"/>
+            </a:ext>
+          </a:extLst>
+        </p:cNvPr>
+        <p:cNvGrpSpPr/>
+        <p:nvPr/>
+      </p:nvGrpSpPr>
+      <p:grpSpPr>
+        <a:xfrm>
+          <a:off x="0" y="0"/>
+          <a:ext cx="0" cy="0"/>
+          <a:chOff x="0" y="0"/>
+          <a:chExt cx="0" cy="0"/>
+        </a:xfrm>
+      </p:grpSpPr>
+      <p:sp>
+        <p:nvSpPr>
+          <p:cNvPr id="3" name="TextBox 2">
+            <a:extLst>
+              <a:ext uri="{FF2B5EF4-FFF2-40B4-BE49-F238E27FC236}">
+                <a16:creationId xmlns:a16="http://schemas.microsoft.com/office/drawing/2014/main" id="{A89C8E66-4243-35FA-F107-646FF44E9679}"/>
+              </a:ext>
+            </a:extLst>
+          </p:cNvPr>
+          <p:cNvSpPr txBox="1"/>
+          <p:nvPr/>
+        </p:nvSpPr>
+        <p:spPr>
+          <a:xfrm>
+            <a:off x="217714" y="255046"/>
+            <a:ext cx="11756571" cy="355354"/>
+          </a:xfrm>
+          <a:prstGeom prst="rect">
+            <a:avLst/>
+          </a:prstGeom>
+          <a:noFill/>
+        </p:spPr>
+        <p:txBody>
+          <a:bodyPr wrap="square">
+            <a:spAutoFit/>
+          </a:bodyPr>
+          <a:lstStyle/>
+          <a:p>
+            <a:pPr>
+              <a:lnSpc>
+                <a:spcPct val="150000"/>
+              </a:lnSpc>
+              <a:buNone/>
+            </a:pPr>
+            <a:r>
+              <a:rPr kumimoji="0" lang="en-US" altLang="en-US" sz="1300" b="0" i="0" u="none" strike="noStrike" cap="none" normalizeH="0" baseline="0">
+                <a:ln>
+                  <a:noFill/>
+                </a:ln>
+                <a:solidFill>
+                  <a:schemeClr val="tx1"/>
+                </a:solidFill>
+                <a:effectLst/>
+                <a:latin typeface="Arial" panose="020B0604020202020204" pitchFamily="34" charset="0"/>
+              </a:rPr>
+              <a:t>.</a:t>
+            </a:r>
+          </a:p>
+        </p:txBody>
+      </p:sp>
+    </p:spTree>
+    <p:extLst>
+      <p:ext uri="{BB962C8B-B14F-4D97-AF65-F5344CB8AC3E}">
+        <p14:creationId xmlns:p14="http://schemas.microsoft.com/office/powerpoint/2010/main" val="1258870873"/>
       </p:ext>
     </p:extLst>
   </p:cSld>
